--- a/presentations/Expression Controller Milestone 1.pptx
+++ b/presentations/Expression Controller Milestone 1.pptx
@@ -1019,7 +1019,7 @@
           <a:p>
             <a:fld id="{00A6180F-3EA1-4748-B4F4-956BB5176995}" type="datetimeFigureOut">
               <a:rPr lang="de-DE" smtClean="0"/>
-              <a:t>10.06.2026</a:t>
+              <a:t>28.09.2026</a:t>
             </a:fld>
             <a:endParaRPr lang="de-DE"/>
           </a:p>
@@ -1177,7 +1177,7 @@
           <a:p>
             <a:fld id="{F13C3961-1900-1342-BF9B-82C3215CD312}" type="slidenum">
               <a:rPr lang="de-DE" smtClean="0"/>
-              <a:t>‹Nr.›</a:t>
+              <a:t>‹#›</a:t>
             </a:fld>
             <a:endParaRPr lang="de-DE"/>
           </a:p>
@@ -6104,10 +6104,10 @@
           <p:nvPr userDrawn="1"/>
         </p:nvPicPr>
         <p:blipFill>
-          <a:blip r:embed="rId5">
+          <a:blip>
             <a:extLst>
               <a:ext uri="{96DAC541-7B7A-43D3-8B79-37D633B846F1}">
-                <asvg:svgBlip xmlns:asvg="http://schemas.microsoft.com/office/drawing/2016/SVG/main" r:embed="rId6"/>
+                <asvg:svgBlip xmlns:asvg="http://schemas.microsoft.com/office/drawing/2016/SVG/main" r:embed="rId5"/>
               </a:ext>
             </a:extLst>
           </a:blip>
@@ -6380,7 +6380,7 @@
                 <a:tabLst/>
                 <a:defRPr/>
               </a:pPr>
-              <a:t>‹Nr.›</a:t>
+              <a:t>‹#›</a:t>
             </a:fld>
             <a:endParaRPr lang="de-DE" sz="1200" dirty="0">
               <a:solidFill>
@@ -6512,7 +6512,7 @@
                 <a:tabLst/>
                 <a:defRPr/>
               </a:pPr>
-              <a:t>10. Juni 2026</a:t>
+              <a:t>28. September 2026</a:t>
             </a:fld>
             <a:endParaRPr lang="de-DE" sz="1200" dirty="0">
               <a:solidFill>
@@ -7051,7 +7051,7 @@
                 <a:tabLst/>
                 <a:defRPr/>
               </a:pPr>
-              <a:t>10. Juni 2026</a:t>
+              <a:t>28. September 2026</a:t>
             </a:fld>
             <a:endParaRPr lang="de-DE" sz="1800" dirty="0">
               <a:solidFill>
